--- a/Image.pptx
+++ b/Image.pptx
@@ -6,7 +6,7 @@
   </p:sldMasterIdLst>
   <p:sldIdLst>
     <p:sldId id="256" r:id="rId2"/>
-    <p:sldId id="259" r:id="rId3"/>
+    <p:sldId id="272" r:id="rId3"/>
     <p:sldId id="263" r:id="rId4"/>
     <p:sldId id="265" r:id="rId5"/>
     <p:sldId id="257" r:id="rId6"/>
@@ -271,7 +271,7 @@
           <a:p>
             <a:fld id="{B0518848-E628-4826-8FF2-35808C85F00A}" type="datetimeFigureOut">
               <a:rPr kumimoji="1" lang="ja-JP" altLang="en-US" smtClean="0"/>
-              <a:t>2025/12/26</a:t>
+              <a:t>2026/1/21</a:t>
             </a:fld>
             <a:endParaRPr kumimoji="1" lang="ja-JP" altLang="en-US"/>
           </a:p>
@@ -501,7 +501,7 @@
           <a:p>
             <a:fld id="{B0518848-E628-4826-8FF2-35808C85F00A}" type="datetimeFigureOut">
               <a:rPr kumimoji="1" lang="ja-JP" altLang="en-US" smtClean="0"/>
-              <a:t>2025/12/26</a:t>
+              <a:t>2026/1/21</a:t>
             </a:fld>
             <a:endParaRPr kumimoji="1" lang="ja-JP" altLang="en-US"/>
           </a:p>
@@ -741,7 +741,7 @@
           <a:p>
             <a:fld id="{B0518848-E628-4826-8FF2-35808C85F00A}" type="datetimeFigureOut">
               <a:rPr kumimoji="1" lang="ja-JP" altLang="en-US" smtClean="0"/>
-              <a:t>2025/12/26</a:t>
+              <a:t>2026/1/21</a:t>
             </a:fld>
             <a:endParaRPr kumimoji="1" lang="ja-JP" altLang="en-US"/>
           </a:p>
@@ -971,7 +971,7 @@
           <a:p>
             <a:fld id="{B0518848-E628-4826-8FF2-35808C85F00A}" type="datetimeFigureOut">
               <a:rPr kumimoji="1" lang="ja-JP" altLang="en-US" smtClean="0"/>
-              <a:t>2025/12/26</a:t>
+              <a:t>2026/1/21</a:t>
             </a:fld>
             <a:endParaRPr kumimoji="1" lang="ja-JP" altLang="en-US"/>
           </a:p>
@@ -1246,7 +1246,7 @@
           <a:p>
             <a:fld id="{B0518848-E628-4826-8FF2-35808C85F00A}" type="datetimeFigureOut">
               <a:rPr kumimoji="1" lang="ja-JP" altLang="en-US" smtClean="0"/>
-              <a:t>2025/12/26</a:t>
+              <a:t>2026/1/21</a:t>
             </a:fld>
             <a:endParaRPr kumimoji="1" lang="ja-JP" altLang="en-US"/>
           </a:p>
@@ -1575,7 +1575,7 @@
           <a:p>
             <a:fld id="{B0518848-E628-4826-8FF2-35808C85F00A}" type="datetimeFigureOut">
               <a:rPr kumimoji="1" lang="ja-JP" altLang="en-US" smtClean="0"/>
-              <a:t>2025/12/26</a:t>
+              <a:t>2026/1/21</a:t>
             </a:fld>
             <a:endParaRPr kumimoji="1" lang="ja-JP" altLang="en-US"/>
           </a:p>
@@ -2051,7 +2051,7 @@
           <a:p>
             <a:fld id="{B0518848-E628-4826-8FF2-35808C85F00A}" type="datetimeFigureOut">
               <a:rPr kumimoji="1" lang="ja-JP" altLang="en-US" smtClean="0"/>
-              <a:t>2025/12/26</a:t>
+              <a:t>2026/1/21</a:t>
             </a:fld>
             <a:endParaRPr kumimoji="1" lang="ja-JP" altLang="en-US"/>
           </a:p>
@@ -2192,7 +2192,7 @@
           <a:p>
             <a:fld id="{B0518848-E628-4826-8FF2-35808C85F00A}" type="datetimeFigureOut">
               <a:rPr kumimoji="1" lang="ja-JP" altLang="en-US" smtClean="0"/>
-              <a:t>2025/12/26</a:t>
+              <a:t>2026/1/21</a:t>
             </a:fld>
             <a:endParaRPr kumimoji="1" lang="ja-JP" altLang="en-US"/>
           </a:p>
@@ -2305,7 +2305,7 @@
           <a:p>
             <a:fld id="{B0518848-E628-4826-8FF2-35808C85F00A}" type="datetimeFigureOut">
               <a:rPr kumimoji="1" lang="ja-JP" altLang="en-US" smtClean="0"/>
-              <a:t>2025/12/26</a:t>
+              <a:t>2026/1/21</a:t>
             </a:fld>
             <a:endParaRPr kumimoji="1" lang="ja-JP" altLang="en-US"/>
           </a:p>
@@ -2648,7 +2648,7 @@
           <a:p>
             <a:fld id="{B0518848-E628-4826-8FF2-35808C85F00A}" type="datetimeFigureOut">
               <a:rPr kumimoji="1" lang="ja-JP" altLang="en-US" smtClean="0"/>
-              <a:t>2025/12/26</a:t>
+              <a:t>2026/1/21</a:t>
             </a:fld>
             <a:endParaRPr kumimoji="1" lang="ja-JP" altLang="en-US"/>
           </a:p>
@@ -2936,7 +2936,7 @@
           <a:p>
             <a:fld id="{B0518848-E628-4826-8FF2-35808C85F00A}" type="datetimeFigureOut">
               <a:rPr kumimoji="1" lang="ja-JP" altLang="en-US" smtClean="0"/>
-              <a:t>2025/12/26</a:t>
+              <a:t>2026/1/21</a:t>
             </a:fld>
             <a:endParaRPr kumimoji="1" lang="ja-JP" altLang="en-US"/>
           </a:p>
@@ -3209,7 +3209,7 @@
           <a:p>
             <a:fld id="{B0518848-E628-4826-8FF2-35808C85F00A}" type="datetimeFigureOut">
               <a:rPr kumimoji="1" lang="ja-JP" altLang="en-US" smtClean="0"/>
-              <a:t>2025/12/26</a:t>
+              <a:t>2026/1/21</a:t>
             </a:fld>
             <a:endParaRPr kumimoji="1" lang="ja-JP" altLang="en-US"/>
           </a:p>
@@ -6287,7 +6287,15 @@
             </a:r>
             <a:r>
               <a:rPr kumimoji="1" lang="ja-JP" altLang="en-US" dirty="0"/>
-              <a:t>と携帯回線との通信でのみ動作を確認したため，正規の大学のネットワークからアクセスできるか不明（大学のセキュリティを</a:t>
+              <a:t>と携帯回線との通信でのみ動作を確認したため，正規の大学のネットワークからアクセスできるか不明（大学のセキュリティ</a:t>
+            </a:r>
+            <a:r>
+              <a:rPr lang="ja-JP" altLang="en-US" dirty="0"/>
+              <a:t>，セキュリティーポリシー</a:t>
+            </a:r>
+            <a:r>
+              <a:rPr kumimoji="1" lang="ja-JP" altLang="en-US" dirty="0"/>
+              <a:t>を</a:t>
             </a:r>
             <a:r>
               <a:rPr lang="en-US" altLang="ja-JP" dirty="0" err="1"/>
@@ -6343,12 +6351,28 @@
           </a:p>
           <a:p>
             <a:r>
-              <a:rPr lang="ja-JP" altLang="en-US" dirty="0"/>
-              <a:t>検証用</a:t>
+              <a:rPr kumimoji="1" lang="en-US" altLang="ja-JP" dirty="0"/>
+              <a:t>VPN</a:t>
             </a:r>
             <a:r>
               <a:rPr kumimoji="1" lang="ja-JP" altLang="en-US" dirty="0"/>
-              <a:t>コードであるため動画をやり取りしているだけであり，カメラやマイクをミュートしたり，相談側が提示したカルテに評価側がメモを行ったりといった機能はっ存在しない</a:t>
+              <a:t>により暗号化された回線内で</a:t>
+            </a:r>
+            <a:r>
+              <a:rPr kumimoji="1" lang="en-US" altLang="ja-JP" dirty="0"/>
+              <a:t>WebRTC</a:t>
+            </a:r>
+            <a:r>
+              <a:rPr kumimoji="1" lang="ja-JP" altLang="en-US" dirty="0"/>
+              <a:t>による暗号化がされており，</a:t>
+            </a:r>
+            <a:r>
+              <a:rPr kumimoji="1" lang="en-US" altLang="ja-JP" dirty="0"/>
+              <a:t>2</a:t>
+            </a:r>
+            <a:r>
+              <a:rPr kumimoji="1" lang="ja-JP" altLang="en-US" dirty="0"/>
+              <a:t>重に暗号化されている</a:t>
             </a:r>
             <a:endParaRPr kumimoji="1" lang="en-US" altLang="ja-JP" dirty="0"/>
           </a:p>
@@ -6381,7 +6405,7 @@
         <p:cNvPr id="1" name="">
           <a:extLst>
             <a:ext uri="{FF2B5EF4-FFF2-40B4-BE49-F238E27FC236}">
-              <a16:creationId xmlns:a16="http://schemas.microsoft.com/office/drawing/2014/main" id="{117C2604-9773-DF2E-AB2F-1EDC35113A43}"/>
+              <a16:creationId xmlns:a16="http://schemas.microsoft.com/office/drawing/2014/main" id="{D0F9D8C2-CD2B-B0C4-12DE-C6F56F0ED32D}"/>
             </a:ext>
           </a:extLst>
         </p:cNvPr>
@@ -6401,7 +6425,7 @@
           <p:cNvPr id="38" name="四角形: 角を丸くする 37">
             <a:extLst>
               <a:ext uri="{FF2B5EF4-FFF2-40B4-BE49-F238E27FC236}">
-                <a16:creationId xmlns:a16="http://schemas.microsoft.com/office/drawing/2014/main" id="{8090A0EA-CE23-0B5A-136B-69E812AF370C}"/>
+                <a16:creationId xmlns:a16="http://schemas.microsoft.com/office/drawing/2014/main" id="{E3A37734-FDD8-C0F6-E5CB-7AB5893FEF3C}"/>
               </a:ext>
             </a:extLst>
           </p:cNvPr>
@@ -6457,7 +6481,7 @@
           <p:cNvPr id="37" name="四角形: 角を丸くする 36">
             <a:extLst>
               <a:ext uri="{FF2B5EF4-FFF2-40B4-BE49-F238E27FC236}">
-                <a16:creationId xmlns:a16="http://schemas.microsoft.com/office/drawing/2014/main" id="{AB2F3304-F72D-638D-AD72-E00F1A4AE66C}"/>
+                <a16:creationId xmlns:a16="http://schemas.microsoft.com/office/drawing/2014/main" id="{B5B59675-6F20-FD8D-84CE-470AAD4FE16E}"/>
               </a:ext>
             </a:extLst>
           </p:cNvPr>
@@ -6513,7 +6537,7 @@
           <p:cNvPr id="2" name="タイトル 1">
             <a:extLst>
               <a:ext uri="{FF2B5EF4-FFF2-40B4-BE49-F238E27FC236}">
-                <a16:creationId xmlns:a16="http://schemas.microsoft.com/office/drawing/2014/main" id="{10C16BC7-EBF1-D8FD-DCB0-EFF666F0CA2B}"/>
+                <a16:creationId xmlns:a16="http://schemas.microsoft.com/office/drawing/2014/main" id="{93CBBB3A-5D94-C9DC-BAB3-CE8F9159F7DA}"/>
               </a:ext>
             </a:extLst>
           </p:cNvPr>
@@ -6542,7 +6566,7 @@
           <p:cNvPr id="5" name="四角形: 角を丸くする 4">
             <a:extLst>
               <a:ext uri="{FF2B5EF4-FFF2-40B4-BE49-F238E27FC236}">
-                <a16:creationId xmlns:a16="http://schemas.microsoft.com/office/drawing/2014/main" id="{281B7DBB-0799-8002-E641-D240FCD374A4}"/>
+                <a16:creationId xmlns:a16="http://schemas.microsoft.com/office/drawing/2014/main" id="{8D29C832-0152-9231-ACA2-A479CFB79DB2}"/>
               </a:ext>
             </a:extLst>
           </p:cNvPr>
@@ -6594,7 +6618,7 @@
           <p:cNvPr id="6" name="四角形: 角を丸くする 5">
             <a:extLst>
               <a:ext uri="{FF2B5EF4-FFF2-40B4-BE49-F238E27FC236}">
-                <a16:creationId xmlns:a16="http://schemas.microsoft.com/office/drawing/2014/main" id="{FBEC4B14-39BD-88E1-88A6-259D441ACDCC}"/>
+                <a16:creationId xmlns:a16="http://schemas.microsoft.com/office/drawing/2014/main" id="{059617C0-F009-A919-89C7-78E4D8226920}"/>
               </a:ext>
             </a:extLst>
           </p:cNvPr>
@@ -6646,7 +6670,7 @@
           <p:cNvPr id="7" name="直線矢印コネクタ 6">
             <a:extLst>
               <a:ext uri="{FF2B5EF4-FFF2-40B4-BE49-F238E27FC236}">
-                <a16:creationId xmlns:a16="http://schemas.microsoft.com/office/drawing/2014/main" id="{6C7F48D5-AEC2-C11F-0A4D-A0FE31C01CEC}"/>
+                <a16:creationId xmlns:a16="http://schemas.microsoft.com/office/drawing/2014/main" id="{1BD1D447-AF17-25DE-FCAE-CF97C9486F24}"/>
               </a:ext>
             </a:extLst>
           </p:cNvPr>
@@ -6690,7 +6714,7 @@
           <p:cNvPr id="19" name="図 18" descr="ゲームの画面&#10;&#10;AI 生成コンテンツは誤りを含む可能性があります。">
             <a:extLst>
               <a:ext uri="{FF2B5EF4-FFF2-40B4-BE49-F238E27FC236}">
-                <a16:creationId xmlns:a16="http://schemas.microsoft.com/office/drawing/2014/main" id="{B35E39AC-E230-7F4E-B591-1D3764803E7B}"/>
+                <a16:creationId xmlns:a16="http://schemas.microsoft.com/office/drawing/2014/main" id="{86F19633-28B5-82E1-7E99-2DE74879A7BC}"/>
               </a:ext>
             </a:extLst>
           </p:cNvPr>
@@ -6720,7 +6744,7 @@
           <p:cNvPr id="20" name="図 19" descr="ゲームの画面&#10;&#10;AI 生成コンテンツは誤りを含む可能性があります。">
             <a:extLst>
               <a:ext uri="{FF2B5EF4-FFF2-40B4-BE49-F238E27FC236}">
-                <a16:creationId xmlns:a16="http://schemas.microsoft.com/office/drawing/2014/main" id="{14C82E69-3F52-BB77-36A0-D5AE4E01715C}"/>
+                <a16:creationId xmlns:a16="http://schemas.microsoft.com/office/drawing/2014/main" id="{21E2DCB2-5D9A-F479-17ED-9E0AC1A4A396}"/>
               </a:ext>
             </a:extLst>
           </p:cNvPr>
@@ -6750,7 +6774,7 @@
           <p:cNvPr id="23" name="直線矢印コネクタ 22">
             <a:extLst>
               <a:ext uri="{FF2B5EF4-FFF2-40B4-BE49-F238E27FC236}">
-                <a16:creationId xmlns:a16="http://schemas.microsoft.com/office/drawing/2014/main" id="{16DF4702-ADD1-6F30-8FF6-3AE0165622B1}"/>
+                <a16:creationId xmlns:a16="http://schemas.microsoft.com/office/drawing/2014/main" id="{BD481AA7-CF21-BFC2-5C8D-4B5E0FEB02B6}"/>
               </a:ext>
             </a:extLst>
           </p:cNvPr>
@@ -6792,7 +6816,7 @@
           <p:cNvPr id="13" name="グループ化 12">
             <a:extLst>
               <a:ext uri="{FF2B5EF4-FFF2-40B4-BE49-F238E27FC236}">
-                <a16:creationId xmlns:a16="http://schemas.microsoft.com/office/drawing/2014/main" id="{9278CA88-4946-0CAE-52C1-740B37DE8E5C}"/>
+                <a16:creationId xmlns:a16="http://schemas.microsoft.com/office/drawing/2014/main" id="{D67BC626-7DC9-5AB9-323A-1BD0074AF7A9}"/>
               </a:ext>
             </a:extLst>
           </p:cNvPr>
@@ -6812,7 +6836,7 @@
             <p:cNvPr id="12" name="楕円 11">
               <a:extLst>
                 <a:ext uri="{FF2B5EF4-FFF2-40B4-BE49-F238E27FC236}">
-                  <a16:creationId xmlns:a16="http://schemas.microsoft.com/office/drawing/2014/main" id="{74B2CB93-52F5-7ABB-B71B-2182D673A403}"/>
+                  <a16:creationId xmlns:a16="http://schemas.microsoft.com/office/drawing/2014/main" id="{32747708-16F5-9A99-FAF3-C0155BB50A8A}"/>
                 </a:ext>
               </a:extLst>
             </p:cNvPr>
@@ -6856,7 +6880,7 @@
             <p:cNvPr id="10" name="正方形/長方形 9">
               <a:extLst>
                 <a:ext uri="{FF2B5EF4-FFF2-40B4-BE49-F238E27FC236}">
-                  <a16:creationId xmlns:a16="http://schemas.microsoft.com/office/drawing/2014/main" id="{E6FE842D-D39B-8FC3-21F0-782A16E50921}"/>
+                  <a16:creationId xmlns:a16="http://schemas.microsoft.com/office/drawing/2014/main" id="{6F50CAFD-A469-9317-F1C8-73723E93A33D}"/>
                 </a:ext>
               </a:extLst>
             </p:cNvPr>
@@ -6902,7 +6926,7 @@
             <p:cNvPr id="11" name="正方形/長方形 10">
               <a:extLst>
                 <a:ext uri="{FF2B5EF4-FFF2-40B4-BE49-F238E27FC236}">
-                  <a16:creationId xmlns:a16="http://schemas.microsoft.com/office/drawing/2014/main" id="{82D9FDBB-EFF4-2A1F-AB12-739ABCB17DC2}"/>
+                  <a16:creationId xmlns:a16="http://schemas.microsoft.com/office/drawing/2014/main" id="{4D94F33C-C07B-EB21-F278-6D8096AF1EE1}"/>
                 </a:ext>
               </a:extLst>
             </p:cNvPr>
@@ -6955,7 +6979,7 @@
           <p:cNvPr id="24" name="直線矢印コネクタ 23">
             <a:extLst>
               <a:ext uri="{FF2B5EF4-FFF2-40B4-BE49-F238E27FC236}">
-                <a16:creationId xmlns:a16="http://schemas.microsoft.com/office/drawing/2014/main" id="{3FFAA4B3-4332-FC72-05E0-928B4E6C1C09}"/>
+                <a16:creationId xmlns:a16="http://schemas.microsoft.com/office/drawing/2014/main" id="{610DA77C-4785-7268-7AA9-88EF51FAB65A}"/>
               </a:ext>
             </a:extLst>
           </p:cNvPr>
@@ -6998,7 +7022,7 @@
           <p:cNvPr id="14" name="グループ化 13">
             <a:extLst>
               <a:ext uri="{FF2B5EF4-FFF2-40B4-BE49-F238E27FC236}">
-                <a16:creationId xmlns:a16="http://schemas.microsoft.com/office/drawing/2014/main" id="{E1FC2C7E-5095-29DE-A005-21BA12EAA2F4}"/>
+                <a16:creationId xmlns:a16="http://schemas.microsoft.com/office/drawing/2014/main" id="{A1FD48C9-2359-3AA5-BF2A-7535A9674CB3}"/>
               </a:ext>
             </a:extLst>
           </p:cNvPr>
@@ -7018,7 +7042,7 @@
             <p:cNvPr id="15" name="楕円 14">
               <a:extLst>
                 <a:ext uri="{FF2B5EF4-FFF2-40B4-BE49-F238E27FC236}">
-                  <a16:creationId xmlns:a16="http://schemas.microsoft.com/office/drawing/2014/main" id="{EBFFAD9D-F7B8-6B13-16C2-686FC22BD241}"/>
+                  <a16:creationId xmlns:a16="http://schemas.microsoft.com/office/drawing/2014/main" id="{86D97656-DDAB-539D-7156-A1F019FF43DE}"/>
                 </a:ext>
               </a:extLst>
             </p:cNvPr>
@@ -7062,7 +7086,7 @@
             <p:cNvPr id="16" name="正方形/長方形 15">
               <a:extLst>
                 <a:ext uri="{FF2B5EF4-FFF2-40B4-BE49-F238E27FC236}">
-                  <a16:creationId xmlns:a16="http://schemas.microsoft.com/office/drawing/2014/main" id="{DEF83F14-5DDE-1C8C-F593-FAFE434DB177}"/>
+                  <a16:creationId xmlns:a16="http://schemas.microsoft.com/office/drawing/2014/main" id="{CA5FF710-6F14-920E-EB57-D733202BA47D}"/>
                 </a:ext>
               </a:extLst>
             </p:cNvPr>
@@ -7108,7 +7132,7 @@
             <p:cNvPr id="17" name="正方形/長方形 16">
               <a:extLst>
                 <a:ext uri="{FF2B5EF4-FFF2-40B4-BE49-F238E27FC236}">
-                  <a16:creationId xmlns:a16="http://schemas.microsoft.com/office/drawing/2014/main" id="{98AF866A-FA80-1235-AB27-5A0720C214C0}"/>
+                  <a16:creationId xmlns:a16="http://schemas.microsoft.com/office/drawing/2014/main" id="{3E3BA65F-CAA7-F31F-8B62-51344232B2B3}"/>
                 </a:ext>
               </a:extLst>
             </p:cNvPr>
@@ -7161,7 +7185,7 @@
           <p:cNvPr id="30" name="グラフィックス 29" descr="世界 枠線">
             <a:extLst>
               <a:ext uri="{FF2B5EF4-FFF2-40B4-BE49-F238E27FC236}">
-                <a16:creationId xmlns:a16="http://schemas.microsoft.com/office/drawing/2014/main" id="{EF736580-3DE8-BD47-FD2F-B49B8622196C}"/>
+                <a16:creationId xmlns:a16="http://schemas.microsoft.com/office/drawing/2014/main" id="{4625DF6E-B7B0-7101-E26E-53FB15AF64C9}"/>
               </a:ext>
             </a:extLst>
           </p:cNvPr>
@@ -7197,7 +7221,7 @@
           <p:cNvPr id="33" name="四角形: 角を丸くする 32">
             <a:extLst>
               <a:ext uri="{FF2B5EF4-FFF2-40B4-BE49-F238E27FC236}">
-                <a16:creationId xmlns:a16="http://schemas.microsoft.com/office/drawing/2014/main" id="{69ADFE7A-331E-635B-F50B-2F53F6635F37}"/>
+                <a16:creationId xmlns:a16="http://schemas.microsoft.com/office/drawing/2014/main" id="{569AC2CD-B42F-7650-85C0-8A4394F36AD6}"/>
               </a:ext>
             </a:extLst>
           </p:cNvPr>
@@ -7249,7 +7273,7 @@
           <p:cNvPr id="34" name="四角形: 角を丸くする 33">
             <a:extLst>
               <a:ext uri="{FF2B5EF4-FFF2-40B4-BE49-F238E27FC236}">
-                <a16:creationId xmlns:a16="http://schemas.microsoft.com/office/drawing/2014/main" id="{E5FD6CF7-424A-0C6B-9852-33283C62DFCC}"/>
+                <a16:creationId xmlns:a16="http://schemas.microsoft.com/office/drawing/2014/main" id="{B020661D-92AC-ACF9-3F70-DB7871F32E1C}"/>
               </a:ext>
             </a:extLst>
           </p:cNvPr>
@@ -7301,7 +7325,7 @@
           <p:cNvPr id="39" name="四角形: 角を丸くする 38">
             <a:extLst>
               <a:ext uri="{FF2B5EF4-FFF2-40B4-BE49-F238E27FC236}">
-                <a16:creationId xmlns:a16="http://schemas.microsoft.com/office/drawing/2014/main" id="{0F2D2F82-1629-B69D-BA18-CEB48AC189F6}"/>
+                <a16:creationId xmlns:a16="http://schemas.microsoft.com/office/drawing/2014/main" id="{1D464C0E-D079-8B4B-C755-F6B23A87D239}"/>
               </a:ext>
             </a:extLst>
           </p:cNvPr>
@@ -7360,7 +7384,7 @@
           <p:cNvPr id="42" name="直線矢印コネクタ 41">
             <a:extLst>
               <a:ext uri="{FF2B5EF4-FFF2-40B4-BE49-F238E27FC236}">
-                <a16:creationId xmlns:a16="http://schemas.microsoft.com/office/drawing/2014/main" id="{3EB4D9F0-5E66-0512-4CA1-182E2DE3F88F}"/>
+                <a16:creationId xmlns:a16="http://schemas.microsoft.com/office/drawing/2014/main" id="{E898061C-BA10-BCB8-D1AE-D48A5036ABBC}"/>
               </a:ext>
             </a:extLst>
           </p:cNvPr>
@@ -7405,7 +7429,7 @@
           <p:cNvPr id="45" name="直線矢印コネクタ 44">
             <a:extLst>
               <a:ext uri="{FF2B5EF4-FFF2-40B4-BE49-F238E27FC236}">
-                <a16:creationId xmlns:a16="http://schemas.microsoft.com/office/drawing/2014/main" id="{E5332287-435D-7D3C-67C5-8AF31111273A}"/>
+                <a16:creationId xmlns:a16="http://schemas.microsoft.com/office/drawing/2014/main" id="{1EF81E30-6069-2529-D839-B510F25B63F7}"/>
               </a:ext>
             </a:extLst>
           </p:cNvPr>
@@ -7448,7 +7472,7 @@
           <p:cNvPr id="50" name="直線矢印コネクタ 49">
             <a:extLst>
               <a:ext uri="{FF2B5EF4-FFF2-40B4-BE49-F238E27FC236}">
-                <a16:creationId xmlns:a16="http://schemas.microsoft.com/office/drawing/2014/main" id="{D441F40F-409A-582F-4EA1-11CE51695C74}"/>
+                <a16:creationId xmlns:a16="http://schemas.microsoft.com/office/drawing/2014/main" id="{9FADAF4B-6107-BEAA-0880-54A54E817A47}"/>
               </a:ext>
             </a:extLst>
           </p:cNvPr>
@@ -7491,7 +7515,7 @@
           <p:cNvPr id="57" name="四角形: 角を丸くする 56">
             <a:extLst>
               <a:ext uri="{FF2B5EF4-FFF2-40B4-BE49-F238E27FC236}">
-                <a16:creationId xmlns:a16="http://schemas.microsoft.com/office/drawing/2014/main" id="{CE0C19F4-E7C0-65FB-33FE-0DB900D2E1B5}"/>
+                <a16:creationId xmlns:a16="http://schemas.microsoft.com/office/drawing/2014/main" id="{3CBB8DF6-F0F2-0AAE-6762-020C9778E63F}"/>
               </a:ext>
             </a:extLst>
           </p:cNvPr>
@@ -7539,7 +7563,7 @@
           <p:cNvPr id="58" name="四角形: 角を丸くする 57">
             <a:extLst>
               <a:ext uri="{FF2B5EF4-FFF2-40B4-BE49-F238E27FC236}">
-                <a16:creationId xmlns:a16="http://schemas.microsoft.com/office/drawing/2014/main" id="{0A2622D7-C9DA-07E0-CFFF-7CFA41F6C24E}"/>
+                <a16:creationId xmlns:a16="http://schemas.microsoft.com/office/drawing/2014/main" id="{EE7C9935-6857-077E-8321-D692DEC2F0B3}"/>
               </a:ext>
             </a:extLst>
           </p:cNvPr>
@@ -7586,7 +7610,7 @@
           <p:cNvPr id="59" name="四角形: 角を丸くする 58">
             <a:extLst>
               <a:ext uri="{FF2B5EF4-FFF2-40B4-BE49-F238E27FC236}">
-                <a16:creationId xmlns:a16="http://schemas.microsoft.com/office/drawing/2014/main" id="{DD97C9A5-D290-6447-2D36-52418DCCC99A}"/>
+                <a16:creationId xmlns:a16="http://schemas.microsoft.com/office/drawing/2014/main" id="{FD1C5268-EC78-D005-485C-48A2A84A936E}"/>
               </a:ext>
             </a:extLst>
           </p:cNvPr>
@@ -7636,7 +7660,7 @@
           <p:cNvPr id="60" name="四角形: 角を丸くする 59">
             <a:extLst>
               <a:ext uri="{FF2B5EF4-FFF2-40B4-BE49-F238E27FC236}">
-                <a16:creationId xmlns:a16="http://schemas.microsoft.com/office/drawing/2014/main" id="{49122A6E-9421-9058-7667-E57390A65E1A}"/>
+                <a16:creationId xmlns:a16="http://schemas.microsoft.com/office/drawing/2014/main" id="{A032E50B-2718-C545-EED5-9938D0999122}"/>
               </a:ext>
             </a:extLst>
           </p:cNvPr>
@@ -7686,7 +7710,7 @@
           <p:cNvPr id="63" name="四角形: 角を丸くする 62">
             <a:extLst>
               <a:ext uri="{FF2B5EF4-FFF2-40B4-BE49-F238E27FC236}">
-                <a16:creationId xmlns:a16="http://schemas.microsoft.com/office/drawing/2014/main" id="{6D325B99-64A1-AA3A-2DAD-48F4D4DD8885}"/>
+                <a16:creationId xmlns:a16="http://schemas.microsoft.com/office/drawing/2014/main" id="{CE0191C7-5D2D-E791-2788-7298AF2366A0}"/>
               </a:ext>
             </a:extLst>
           </p:cNvPr>
@@ -7736,7 +7760,7 @@
     </p:spTree>
     <p:extLst>
       <p:ext uri="{BB962C8B-B14F-4D97-AF65-F5344CB8AC3E}">
-        <p14:creationId xmlns:p14="http://schemas.microsoft.com/office/powerpoint/2010/main" val="2944277837"/>
+        <p14:creationId xmlns:p14="http://schemas.microsoft.com/office/powerpoint/2010/main" val="2093634203"/>
       </p:ext>
     </p:extLst>
   </p:cSld>
@@ -11318,6 +11342,56 @@
           </a:p>
         </p:txBody>
       </p:sp>
+      <p:sp>
+        <p:nvSpPr>
+          <p:cNvPr id="4" name="楕円 3">
+            <a:extLst>
+              <a:ext uri="{FF2B5EF4-FFF2-40B4-BE49-F238E27FC236}">
+                <a16:creationId xmlns:a16="http://schemas.microsoft.com/office/drawing/2014/main" id="{99CDD458-E8A6-4236-5DAD-ACAFC7291C8D}"/>
+              </a:ext>
+            </a:extLst>
+          </p:cNvPr>
+          <p:cNvSpPr/>
+          <p:nvPr/>
+        </p:nvSpPr>
+        <p:spPr>
+          <a:xfrm>
+            <a:off x="1453811" y="5542055"/>
+            <a:ext cx="9575550" cy="1132121"/>
+          </a:xfrm>
+          <a:prstGeom prst="ellipse">
+            <a:avLst/>
+          </a:prstGeom>
+          <a:noFill/>
+          <a:ln w="38100">
+            <a:solidFill>
+              <a:schemeClr val="accent5"/>
+            </a:solidFill>
+          </a:ln>
+        </p:spPr>
+        <p:style>
+          <a:lnRef idx="2">
+            <a:schemeClr val="accent2"/>
+          </a:lnRef>
+          <a:fillRef idx="1">
+            <a:schemeClr val="lt1"/>
+          </a:fillRef>
+          <a:effectRef idx="0">
+            <a:schemeClr val="accent2"/>
+          </a:effectRef>
+          <a:fontRef idx="minor">
+            <a:schemeClr val="dk1"/>
+          </a:fontRef>
+        </p:style>
+        <p:txBody>
+          <a:bodyPr rtlCol="0" anchor="ctr"/>
+          <a:lstStyle/>
+          <a:p>
+            <a:pPr algn="ctr"/>
+            <a:endParaRPr kumimoji="1" lang="ja-JP" altLang="en-US"/>
+          </a:p>
+        </p:txBody>
+      </p:sp>
     </p:spTree>
     <p:extLst>
       <p:ext uri="{BB962C8B-B14F-4D97-AF65-F5344CB8AC3E}">
@@ -11605,7 +11679,7 @@
         </p:spPr>
         <p:txBody>
           <a:bodyPr>
-            <a:normAutofit fontScale="92500" lnSpcReduction="20000"/>
+            <a:normAutofit fontScale="85000" lnSpcReduction="10000"/>
           </a:bodyPr>
           <a:lstStyle/>
           <a:p>
@@ -11647,7 +11721,27 @@
             </a:r>
             <a:r>
               <a:rPr lang="ja-JP" altLang="en-US" dirty="0"/>
-              <a:t>が使いやすい？　</a:t>
+              <a:t>が使いやすい？</a:t>
+            </a:r>
+            <a:r>
+              <a:rPr lang="en-US" altLang="ja-JP" dirty="0"/>
+              <a:t>(</a:t>
+            </a:r>
+            <a:r>
+              <a:rPr lang="ja-JP" altLang="en-US" b="1" dirty="0"/>
+              <a:t>インターネット</a:t>
+            </a:r>
+            <a:r>
+              <a:rPr lang="en-US" altLang="ja-JP" b="1" dirty="0"/>
+              <a:t>VPN</a:t>
+            </a:r>
+            <a:r>
+              <a:rPr lang="en-US" altLang="ja-JP" dirty="0"/>
+              <a:t>)</a:t>
+            </a:r>
+            <a:r>
+              <a:rPr lang="ja-JP" altLang="en-US" dirty="0"/>
+              <a:t>　</a:t>
             </a:r>
             <a:r>
               <a:rPr lang="en-US" altLang="ja-JP" dirty="0">
@@ -14072,7 +14166,15 @@
           <a:p>
             <a:r>
               <a:rPr lang="ja-JP" altLang="en-US" dirty="0"/>
-              <a:t>オープンソース</a:t>
+              <a:t>オープンソース（</a:t>
+            </a:r>
+            <a:r>
+              <a:rPr lang="en-US" altLang="ja-JP" dirty="0"/>
+              <a:t>Google</a:t>
+            </a:r>
+            <a:r>
+              <a:rPr lang="ja-JP" altLang="en-US" dirty="0"/>
+              <a:t>が主導して開発，ブラウザは標準で対応）</a:t>
             </a:r>
             <a:endParaRPr lang="en-US" altLang="ja-JP" dirty="0"/>
           </a:p>
